--- a/make_presentation/templates/templates/creative/_11.pptx
+++ b/make_presentation/templates/templates/creative/_11.pptx
@@ -77,19 +77,7 @@
               <a:rPr b="0" lang="en-US" sz="4400" spc="-1" strike="noStrike">
                 <a:latin typeface="Arial"/>
               </a:rPr>
-              <a:t>Click to </a:t>
-            </a:r>
-            <a:r>
-              <a:rPr b="0" lang="en-US" sz="4400" spc="-1" strike="noStrike">
-                <a:latin typeface="Arial"/>
-              </a:rPr>
-              <a:t>move </a:t>
-            </a:r>
-            <a:r>
-              <a:rPr b="0" lang="en-US" sz="4400" spc="-1" strike="noStrike">
-                <a:latin typeface="Arial"/>
-              </a:rPr>
-              <a:t>the slide</a:t>
+              <a:t>Click to move the slide</a:t>
             </a:r>
             <a:endParaRPr b="0" lang="en-US" sz="4400" spc="-1" strike="noStrike">
               <a:latin typeface="Arial"/>
@@ -129,13 +117,7 @@
               <a:rPr b="0" lang="en-US" sz="2000" spc="-1" strike="noStrike">
                 <a:latin typeface="Arial"/>
               </a:rPr>
-              <a:t>Click to edit the </a:t>
-            </a:r>
-            <a:r>
-              <a:rPr b="0" lang="en-US" sz="2000" spc="-1" strike="noStrike">
-                <a:latin typeface="Arial"/>
-              </a:rPr>
-              <a:t>notes format</a:t>
+              <a:t>Click to edit the notes format</a:t>
             </a:r>
             <a:endParaRPr b="0" lang="en-US" sz="2000" spc="-1" strike="noStrike">
               <a:latin typeface="Arial"/>
@@ -320,7 +302,7 @@
             <a:pPr algn="r">
               <a:buNone/>
             </a:pPr>
-            <a:fld id="{B42F44C2-B564-4079-8680-B7B3937B7200}" type="slidenum">
+            <a:fld id="{221FAA00-F185-4AEF-A237-6D5F81C99A3D}" type="slidenum">
               <a:rPr b="0" lang="en-US" sz="1400" spc="-1" strike="noStrike">
                 <a:latin typeface="Times New Roman"/>
               </a:rPr>
@@ -368,7 +350,7 @@
         <p:spPr>
           <a:xfrm>
             <a:off x="685800" y="1143000"/>
-            <a:ext cx="5485680" cy="3085560"/>
+            <a:ext cx="5485320" cy="3085200"/>
           </a:xfrm>
           <a:prstGeom prst="rect">
             <a:avLst/>
@@ -391,7 +373,7 @@
         <p:spPr>
           <a:xfrm>
             <a:off x="685800" y="4400640"/>
-            <a:ext cx="5485680" cy="3599640"/>
+            <a:ext cx="5485320" cy="3599280"/>
           </a:xfrm>
           <a:prstGeom prst="rect">
             <a:avLst/>
@@ -425,7 +407,7 @@
         <p:spPr>
           <a:xfrm>
             <a:off x="3884760" y="8685360"/>
-            <a:ext cx="2971080" cy="457920"/>
+            <a:ext cx="2970720" cy="457560"/>
           </a:xfrm>
           <a:prstGeom prst="rect">
             <a:avLst/>
@@ -457,7 +439,7 @@
               </a:lnSpc>
               <a:buNone/>
             </a:pPr>
-            <a:fld id="{9428B915-3A36-4756-B7C6-27649F3342C8}" type="slidenum">
+            <a:fld id="{7020B0E7-2F11-4E2A-9D74-51323DE78BA2}" type="slidenum">
               <a:rPr b="0" lang="ru-RU" sz="1200" spc="-1" strike="noStrike">
                 <a:latin typeface="Times New Roman"/>
               </a:rPr>
@@ -504,7 +486,7 @@
         <p:spPr>
           <a:xfrm>
             <a:off x="685800" y="1143000"/>
-            <a:ext cx="5485680" cy="3085560"/>
+            <a:ext cx="5485320" cy="3085200"/>
           </a:xfrm>
           <a:prstGeom prst="rect">
             <a:avLst/>
@@ -527,7 +509,7 @@
         <p:spPr>
           <a:xfrm>
             <a:off x="685800" y="4400640"/>
-            <a:ext cx="5485680" cy="3599640"/>
+            <a:ext cx="5485320" cy="3599280"/>
           </a:xfrm>
           <a:prstGeom prst="rect">
             <a:avLst/>
@@ -561,7 +543,7 @@
         <p:spPr>
           <a:xfrm>
             <a:off x="3884760" y="8685360"/>
-            <a:ext cx="2971080" cy="457920"/>
+            <a:ext cx="2970720" cy="457560"/>
           </a:xfrm>
           <a:prstGeom prst="rect">
             <a:avLst/>
@@ -593,7 +575,7 @@
               </a:lnSpc>
               <a:buNone/>
             </a:pPr>
-            <a:fld id="{EF1FA05B-7451-4DFA-B11E-F7BA7402F0FD}" type="slidenum">
+            <a:fld id="{4D9F7E87-7C68-48EA-8B4E-DEB466B66F71}" type="slidenum">
               <a:rPr b="0" lang="ru-RU" sz="1200" spc="-1" strike="noStrike">
                 <a:latin typeface="Times New Roman"/>
               </a:rPr>
@@ -640,7 +622,7 @@
         <p:spPr>
           <a:xfrm>
             <a:off x="685800" y="1143000"/>
-            <a:ext cx="5485680" cy="3085560"/>
+            <a:ext cx="5485320" cy="3085200"/>
           </a:xfrm>
           <a:prstGeom prst="rect">
             <a:avLst/>
@@ -663,7 +645,7 @@
         <p:spPr>
           <a:xfrm>
             <a:off x="685800" y="4400640"/>
-            <a:ext cx="5485680" cy="3599640"/>
+            <a:ext cx="5485320" cy="3599280"/>
           </a:xfrm>
           <a:prstGeom prst="rect">
             <a:avLst/>
@@ -697,7 +679,7 @@
         <p:spPr>
           <a:xfrm>
             <a:off x="3884760" y="8685360"/>
-            <a:ext cx="2971080" cy="457920"/>
+            <a:ext cx="2970720" cy="457560"/>
           </a:xfrm>
           <a:prstGeom prst="rect">
             <a:avLst/>
@@ -729,7 +711,7 @@
               </a:lnSpc>
               <a:buNone/>
             </a:pPr>
-            <a:fld id="{8DFCBC1D-5328-446C-BE81-A7F08A69F983}" type="slidenum">
+            <a:fld id="{992443E9-5040-4D34-B0E0-91A0634B5E44}" type="slidenum">
               <a:rPr b="0" lang="ru-RU" sz="1200" spc="-1" strike="noStrike">
                 <a:latin typeface="Times New Roman"/>
               </a:rPr>
@@ -776,7 +758,7 @@
         <p:spPr>
           <a:xfrm>
             <a:off x="685800" y="1143000"/>
-            <a:ext cx="5485680" cy="3085560"/>
+            <a:ext cx="5485320" cy="3085200"/>
           </a:xfrm>
           <a:prstGeom prst="rect">
             <a:avLst/>
@@ -799,7 +781,7 @@
         <p:spPr>
           <a:xfrm>
             <a:off x="685800" y="4400640"/>
-            <a:ext cx="5485680" cy="3599640"/>
+            <a:ext cx="5485320" cy="3599280"/>
           </a:xfrm>
           <a:prstGeom prst="rect">
             <a:avLst/>
@@ -833,7 +815,7 @@
         <p:spPr>
           <a:xfrm>
             <a:off x="3884760" y="8685360"/>
-            <a:ext cx="2971080" cy="457920"/>
+            <a:ext cx="2970720" cy="457560"/>
           </a:xfrm>
           <a:prstGeom prst="rect">
             <a:avLst/>
@@ -865,7 +847,7 @@
               </a:lnSpc>
               <a:buNone/>
             </a:pPr>
-            <a:fld id="{EA5FBCB7-6F9E-4CD5-9089-68A807643C06}" type="slidenum">
+            <a:fld id="{E1841A52-A17C-4BD9-B968-C2C9F5DD51BD}" type="slidenum">
               <a:rPr b="0" lang="ru-RU" sz="1200" spc="-1" strike="noStrike">
                 <a:latin typeface="Times New Roman"/>
               </a:rPr>
@@ -933,7 +915,7 @@
         <p:txBody>
           <a:bodyPr/>
           <a:p>
-            <a:fld id="{25E18114-0845-4241-B6E8-E774F1072B65}" type="slidenum">
+            <a:fld id="{D49DF6F5-7B81-43D7-9F90-37C8179F28D0}" type="slidenum">
               <a:t>&lt;#&gt;</a:t>
             </a:fld>
           </a:p>
@@ -995,7 +977,7 @@
         <p:spPr>
           <a:xfrm>
             <a:off x="1143000" y="841680"/>
-            <a:ext cx="6857280" cy="1789920"/>
+            <a:ext cx="6856920" cy="1789560"/>
           </a:xfrm>
           <a:prstGeom prst="rect">
             <a:avLst/>
@@ -1032,7 +1014,7 @@
         <p:spPr>
           <a:xfrm>
             <a:off x="457200" y="1203480"/>
-            <a:ext cx="8229240" cy="1422720"/>
+            <a:ext cx="8228880" cy="1422360"/>
           </a:xfrm>
           <a:prstGeom prst="rect">
             <a:avLst/>
@@ -1065,8 +1047,8 @@
         </p:nvSpPr>
         <p:spPr>
           <a:xfrm>
-            <a:off x="457200" y="2761920"/>
-            <a:ext cx="8229240" cy="1422720"/>
+            <a:off x="457200" y="2761200"/>
+            <a:ext cx="8228880" cy="1422360"/>
           </a:xfrm>
           <a:prstGeom prst="rect">
             <a:avLst/>
@@ -1121,7 +1103,7 @@
         <p:txBody>
           <a:bodyPr/>
           <a:p>
-            <a:fld id="{B62EF41B-089F-4477-AF1F-B9DC6FC2E45C}" type="slidenum">
+            <a:fld id="{0AFFD67F-53F1-421B-9EFC-A8343054ACE6}" type="slidenum">
               <a:t>&lt;#&gt;</a:t>
             </a:fld>
           </a:p>
@@ -1183,7 +1165,7 @@
         <p:spPr>
           <a:xfrm>
             <a:off x="1143000" y="841680"/>
-            <a:ext cx="6857280" cy="1789920"/>
+            <a:ext cx="6856920" cy="1789560"/>
           </a:xfrm>
           <a:prstGeom prst="rect">
             <a:avLst/>
@@ -1220,7 +1202,7 @@
         <p:spPr>
           <a:xfrm>
             <a:off x="457200" y="1203480"/>
-            <a:ext cx="4015800" cy="1422720"/>
+            <a:ext cx="4015440" cy="1422360"/>
           </a:xfrm>
           <a:prstGeom prst="rect">
             <a:avLst/>
@@ -1253,8 +1235,8 @@
         </p:nvSpPr>
         <p:spPr>
           <a:xfrm>
-            <a:off x="4674240" y="1203480"/>
-            <a:ext cx="4015800" cy="1422720"/>
+            <a:off x="4673880" y="1203480"/>
+            <a:ext cx="4015440" cy="1422360"/>
           </a:xfrm>
           <a:prstGeom prst="rect">
             <a:avLst/>
@@ -1287,8 +1269,8 @@
         </p:nvSpPr>
         <p:spPr>
           <a:xfrm>
-            <a:off x="457200" y="2761920"/>
-            <a:ext cx="4015800" cy="1422720"/>
+            <a:off x="457200" y="2761200"/>
+            <a:ext cx="4015440" cy="1422360"/>
           </a:xfrm>
           <a:prstGeom prst="rect">
             <a:avLst/>
@@ -1321,8 +1303,8 @@
         </p:nvSpPr>
         <p:spPr>
           <a:xfrm>
-            <a:off x="4674240" y="2761920"/>
-            <a:ext cx="4015800" cy="1422720"/>
+            <a:off x="4673880" y="2761200"/>
+            <a:ext cx="4015440" cy="1422360"/>
           </a:xfrm>
           <a:prstGeom prst="rect">
             <a:avLst/>
@@ -1377,7 +1359,7 @@
         <p:txBody>
           <a:bodyPr/>
           <a:p>
-            <a:fld id="{EFB7E78E-A4C9-4C13-9162-A64A55D1785B}" type="slidenum">
+            <a:fld id="{972FE1DC-D81E-4552-B97D-309EDA8102FA}" type="slidenum">
               <a:t>&lt;#&gt;</a:t>
             </a:fld>
           </a:p>
@@ -1439,7 +1421,7 @@
         <p:spPr>
           <a:xfrm>
             <a:off x="1143000" y="841680"/>
-            <a:ext cx="6857280" cy="1789920"/>
+            <a:ext cx="6856920" cy="1789560"/>
           </a:xfrm>
           <a:prstGeom prst="rect">
             <a:avLst/>
@@ -1476,7 +1458,7 @@
         <p:spPr>
           <a:xfrm>
             <a:off x="457200" y="1203480"/>
-            <a:ext cx="2649600" cy="1422720"/>
+            <a:ext cx="2649600" cy="1422360"/>
           </a:xfrm>
           <a:prstGeom prst="rect">
             <a:avLst/>
@@ -1510,7 +1492,7 @@
         <p:spPr>
           <a:xfrm>
             <a:off x="3239640" y="1203480"/>
-            <a:ext cx="2649600" cy="1422720"/>
+            <a:ext cx="2649600" cy="1422360"/>
           </a:xfrm>
           <a:prstGeom prst="rect">
             <a:avLst/>
@@ -1544,7 +1526,7 @@
         <p:spPr>
           <a:xfrm>
             <a:off x="6022080" y="1203480"/>
-            <a:ext cx="2649600" cy="1422720"/>
+            <a:ext cx="2649600" cy="1422360"/>
           </a:xfrm>
           <a:prstGeom prst="rect">
             <a:avLst/>
@@ -1577,8 +1559,8 @@
         </p:nvSpPr>
         <p:spPr>
           <a:xfrm>
-            <a:off x="457200" y="2761920"/>
-            <a:ext cx="2649600" cy="1422720"/>
+            <a:off x="457200" y="2761200"/>
+            <a:ext cx="2649600" cy="1422360"/>
           </a:xfrm>
           <a:prstGeom prst="rect">
             <a:avLst/>
@@ -1611,8 +1593,8 @@
         </p:nvSpPr>
         <p:spPr>
           <a:xfrm>
-            <a:off x="3239640" y="2761920"/>
-            <a:ext cx="2649600" cy="1422720"/>
+            <a:off x="3239640" y="2761200"/>
+            <a:ext cx="2649600" cy="1422360"/>
           </a:xfrm>
           <a:prstGeom prst="rect">
             <a:avLst/>
@@ -1645,8 +1627,8 @@
         </p:nvSpPr>
         <p:spPr>
           <a:xfrm>
-            <a:off x="6022080" y="2761920"/>
-            <a:ext cx="2649600" cy="1422720"/>
+            <a:off x="6022080" y="2761200"/>
+            <a:ext cx="2649600" cy="1422360"/>
           </a:xfrm>
           <a:prstGeom prst="rect">
             <a:avLst/>
@@ -1701,7 +1683,7 @@
         <p:txBody>
           <a:bodyPr/>
           <a:p>
-            <a:fld id="{0337B3BC-E8F1-41A6-BCFE-CA025C17E6E0}" type="slidenum">
+            <a:fld id="{B26900A2-AA34-4FD3-B327-F09E58AF768C}" type="slidenum">
               <a:t>&lt;#&gt;</a:t>
             </a:fld>
           </a:p>
@@ -1763,7 +1745,7 @@
         <p:spPr>
           <a:xfrm>
             <a:off x="1143000" y="841680"/>
-            <a:ext cx="6857280" cy="1789920"/>
+            <a:ext cx="6856920" cy="1789560"/>
           </a:xfrm>
           <a:prstGeom prst="rect">
             <a:avLst/>
@@ -1800,7 +1782,7 @@
         <p:spPr>
           <a:xfrm>
             <a:off x="457200" y="1203480"/>
-            <a:ext cx="8229240" cy="2982960"/>
+            <a:ext cx="8228880" cy="2982600"/>
           </a:xfrm>
           <a:prstGeom prst="rect">
             <a:avLst/>
@@ -1858,7 +1840,7 @@
         <p:txBody>
           <a:bodyPr/>
           <a:p>
-            <a:fld id="{AE6C6AEF-DBE4-4704-8A40-8D2036A51A5D}" type="slidenum">
+            <a:fld id="{4F7EBC2E-5877-4B1E-A9E5-9256B7F57277}" type="slidenum">
               <a:t>&lt;#&gt;</a:t>
             </a:fld>
           </a:p>
@@ -1920,7 +1902,7 @@
         <p:spPr>
           <a:xfrm>
             <a:off x="1143000" y="841680"/>
-            <a:ext cx="6857280" cy="1789920"/>
+            <a:ext cx="6856920" cy="1789560"/>
           </a:xfrm>
           <a:prstGeom prst="rect">
             <a:avLst/>
@@ -1957,7 +1939,7 @@
         <p:spPr>
           <a:xfrm>
             <a:off x="457200" y="1203480"/>
-            <a:ext cx="8229240" cy="2982960"/>
+            <a:ext cx="8228880" cy="2982600"/>
           </a:xfrm>
           <a:prstGeom prst="rect">
             <a:avLst/>
@@ -2012,7 +1994,7 @@
         <p:txBody>
           <a:bodyPr/>
           <a:p>
-            <a:fld id="{70879F2E-05B0-4993-A391-42A47A2B86C7}" type="slidenum">
+            <a:fld id="{AF659C9D-EA4B-45DF-9253-A817DAB21DC5}" type="slidenum">
               <a:t>&lt;#&gt;</a:t>
             </a:fld>
           </a:p>
@@ -2074,7 +2056,7 @@
         <p:spPr>
           <a:xfrm>
             <a:off x="1143000" y="841680"/>
-            <a:ext cx="6857280" cy="1789920"/>
+            <a:ext cx="6856920" cy="1789560"/>
           </a:xfrm>
           <a:prstGeom prst="rect">
             <a:avLst/>
@@ -2111,7 +2093,7 @@
         <p:spPr>
           <a:xfrm>
             <a:off x="457200" y="1203480"/>
-            <a:ext cx="4015800" cy="2982960"/>
+            <a:ext cx="4015440" cy="2982600"/>
           </a:xfrm>
           <a:prstGeom prst="rect">
             <a:avLst/>
@@ -2144,8 +2126,8 @@
         </p:nvSpPr>
         <p:spPr>
           <a:xfrm>
-            <a:off x="4674240" y="1203480"/>
-            <a:ext cx="4015800" cy="2982960"/>
+            <a:off x="4673880" y="1203480"/>
+            <a:ext cx="4015440" cy="2982600"/>
           </a:xfrm>
           <a:prstGeom prst="rect">
             <a:avLst/>
@@ -2200,7 +2182,7 @@
         <p:txBody>
           <a:bodyPr/>
           <a:p>
-            <a:fld id="{9FA61060-28AC-43CE-81AB-8552F06B7AA6}" type="slidenum">
+            <a:fld id="{48A2BB2A-D161-4D38-A890-EC40CECA08E5}" type="slidenum">
               <a:t>&lt;#&gt;</a:t>
             </a:fld>
           </a:p>
@@ -2262,7 +2244,7 @@
         <p:spPr>
           <a:xfrm>
             <a:off x="1143000" y="841680"/>
-            <a:ext cx="6857280" cy="1789920"/>
+            <a:ext cx="6856920" cy="1789560"/>
           </a:xfrm>
           <a:prstGeom prst="rect">
             <a:avLst/>
@@ -2320,7 +2302,7 @@
         <p:txBody>
           <a:bodyPr/>
           <a:p>
-            <a:fld id="{7EBEC3CF-26BA-47FE-85C4-C66D92FFF456}" type="slidenum">
+            <a:fld id="{DA62A99F-4D84-4AA6-9F8C-C6AB84D0A185}" type="slidenum">
               <a:t>&lt;#&gt;</a:t>
             </a:fld>
           </a:p>
@@ -2382,7 +2364,7 @@
         <p:spPr>
           <a:xfrm>
             <a:off x="1143000" y="841680"/>
-            <a:ext cx="6857280" cy="8298360"/>
+            <a:ext cx="6856920" cy="8296560"/>
           </a:xfrm>
           <a:prstGeom prst="rect">
             <a:avLst/>
@@ -2440,7 +2422,7 @@
         <p:txBody>
           <a:bodyPr/>
           <a:p>
-            <a:fld id="{BA6E1ACC-0CAD-4EA7-BB68-6C97E3F78B6C}" type="slidenum">
+            <a:fld id="{37EBB640-7617-4C88-A14F-670978B761F5}" type="slidenum">
               <a:t>&lt;#&gt;</a:t>
             </a:fld>
           </a:p>
@@ -2502,7 +2484,7 @@
         <p:spPr>
           <a:xfrm>
             <a:off x="1143000" y="841680"/>
-            <a:ext cx="6857280" cy="1789920"/>
+            <a:ext cx="6856920" cy="1789560"/>
           </a:xfrm>
           <a:prstGeom prst="rect">
             <a:avLst/>
@@ -2539,7 +2521,7 @@
         <p:spPr>
           <a:xfrm>
             <a:off x="457200" y="1203480"/>
-            <a:ext cx="4015800" cy="1422720"/>
+            <a:ext cx="4015440" cy="1422360"/>
           </a:xfrm>
           <a:prstGeom prst="rect">
             <a:avLst/>
@@ -2572,8 +2554,8 @@
         </p:nvSpPr>
         <p:spPr>
           <a:xfrm>
-            <a:off x="4674240" y="1203480"/>
-            <a:ext cx="4015800" cy="2982960"/>
+            <a:off x="4673880" y="1203480"/>
+            <a:ext cx="4015440" cy="2982600"/>
           </a:xfrm>
           <a:prstGeom prst="rect">
             <a:avLst/>
@@ -2606,8 +2588,8 @@
         </p:nvSpPr>
         <p:spPr>
           <a:xfrm>
-            <a:off x="457200" y="2761920"/>
-            <a:ext cx="4015800" cy="1422720"/>
+            <a:off x="457200" y="2761200"/>
+            <a:ext cx="4015440" cy="1422360"/>
           </a:xfrm>
           <a:prstGeom prst="rect">
             <a:avLst/>
@@ -2662,7 +2644,7 @@
         <p:txBody>
           <a:bodyPr/>
           <a:p>
-            <a:fld id="{11F49F43-F0BE-4B3D-AD19-CF72C5276CA3}" type="slidenum">
+            <a:fld id="{536ED6A8-6AC4-4FC6-B60E-A408A985D3EF}" type="slidenum">
               <a:t>&lt;#&gt;</a:t>
             </a:fld>
           </a:p>
@@ -2724,7 +2706,7 @@
         <p:spPr>
           <a:xfrm>
             <a:off x="1143000" y="841680"/>
-            <a:ext cx="6857280" cy="1789920"/>
+            <a:ext cx="6856920" cy="1789560"/>
           </a:xfrm>
           <a:prstGeom prst="rect">
             <a:avLst/>
@@ -2761,7 +2743,7 @@
         <p:spPr>
           <a:xfrm>
             <a:off x="457200" y="1203480"/>
-            <a:ext cx="4015800" cy="2982960"/>
+            <a:ext cx="4015440" cy="2982600"/>
           </a:xfrm>
           <a:prstGeom prst="rect">
             <a:avLst/>
@@ -2794,8 +2776,8 @@
         </p:nvSpPr>
         <p:spPr>
           <a:xfrm>
-            <a:off x="4674240" y="1203480"/>
-            <a:ext cx="4015800" cy="1422720"/>
+            <a:off x="4673880" y="1203480"/>
+            <a:ext cx="4015440" cy="1422360"/>
           </a:xfrm>
           <a:prstGeom prst="rect">
             <a:avLst/>
@@ -2828,8 +2810,8 @@
         </p:nvSpPr>
         <p:spPr>
           <a:xfrm>
-            <a:off x="4674240" y="2761920"/>
-            <a:ext cx="4015800" cy="1422720"/>
+            <a:off x="4673880" y="2761200"/>
+            <a:ext cx="4015440" cy="1422360"/>
           </a:xfrm>
           <a:prstGeom prst="rect">
             <a:avLst/>
@@ -2884,7 +2866,7 @@
         <p:txBody>
           <a:bodyPr/>
           <a:p>
-            <a:fld id="{0ACC085F-7FC6-417A-8BBC-3B4FDD700F1C}" type="slidenum">
+            <a:fld id="{C07E5DE2-C48C-486A-B4B5-02A1411D86B6}" type="slidenum">
               <a:t>&lt;#&gt;</a:t>
             </a:fld>
           </a:p>
@@ -2946,7 +2928,7 @@
         <p:spPr>
           <a:xfrm>
             <a:off x="1143000" y="841680"/>
-            <a:ext cx="6857280" cy="1789920"/>
+            <a:ext cx="6856920" cy="1789560"/>
           </a:xfrm>
           <a:prstGeom prst="rect">
             <a:avLst/>
@@ -2983,7 +2965,7 @@
         <p:spPr>
           <a:xfrm>
             <a:off x="457200" y="1203480"/>
-            <a:ext cx="4015800" cy="1422720"/>
+            <a:ext cx="4015440" cy="1422360"/>
           </a:xfrm>
           <a:prstGeom prst="rect">
             <a:avLst/>
@@ -3016,8 +2998,8 @@
         </p:nvSpPr>
         <p:spPr>
           <a:xfrm>
-            <a:off x="4674240" y="1203480"/>
-            <a:ext cx="4015800" cy="1422720"/>
+            <a:off x="4673880" y="1203480"/>
+            <a:ext cx="4015440" cy="1422360"/>
           </a:xfrm>
           <a:prstGeom prst="rect">
             <a:avLst/>
@@ -3050,8 +3032,8 @@
         </p:nvSpPr>
         <p:spPr>
           <a:xfrm>
-            <a:off x="457200" y="2761920"/>
-            <a:ext cx="8229240" cy="1422720"/>
+            <a:off x="457200" y="2761200"/>
+            <a:ext cx="8228880" cy="1422360"/>
           </a:xfrm>
           <a:prstGeom prst="rect">
             <a:avLst/>
@@ -3106,7 +3088,7 @@
         <p:txBody>
           <a:bodyPr/>
           <a:p>
-            <a:fld id="{CF8CED28-9780-4A27-8701-F92E0FD7066F}" type="slidenum">
+            <a:fld id="{CED9E42C-C8C5-42B5-84C7-39E377D75363}" type="slidenum">
               <a:t>&lt;#&gt;</a:t>
             </a:fld>
           </a:p>
@@ -3175,7 +3157,7 @@
         <p:spPr>
           <a:xfrm>
             <a:off x="1143000" y="841680"/>
-            <a:ext cx="6857280" cy="1789920"/>
+            <a:ext cx="6856920" cy="1789560"/>
           </a:xfrm>
           <a:prstGeom prst="rect">
             <a:avLst/>
@@ -3194,13 +3176,7 @@
               <a:rPr b="0" lang="en-US" sz="1800" spc="-1" strike="noStrike">
                 <a:latin typeface="Arial"/>
               </a:rPr>
-              <a:t>Click to edit the title text </a:t>
-            </a:r>
-            <a:r>
-              <a:rPr b="0" lang="en-US" sz="1800" spc="-1" strike="noStrike">
-                <a:latin typeface="Arial"/>
-              </a:rPr>
-              <a:t>format</a:t>
+              <a:t>Click to edit the title text format</a:t>
             </a:r>
             <a:endParaRPr b="0" lang="en-US" sz="1800" spc="-1" strike="noStrike">
               <a:latin typeface="Arial"/>
@@ -3211,173 +3187,6 @@
       <p:sp>
         <p:nvSpPr>
           <p:cNvPr id="1" name="PlaceHolder 2"/>
-          <p:cNvSpPr>
-            <a:spLocks noGrp="1"/>
-          </p:cNvSpPr>
-          <p:nvPr>
-            <p:ph type="ftr" idx="1"/>
-          </p:nvPr>
-        </p:nvSpPr>
-        <p:spPr>
-          <a:xfrm>
-            <a:off x="3029040" y="4767120"/>
-            <a:ext cx="3085560" cy="273240"/>
-          </a:xfrm>
-          <a:prstGeom prst="rect">
-            <a:avLst/>
-          </a:prstGeom>
-          <a:noFill/>
-          <a:ln w="0">
-            <a:noFill/>
-          </a:ln>
-        </p:spPr>
-        <p:txBody>
-          <a:bodyPr lIns="90000" rIns="90000" tIns="45000" bIns="45000" anchor="ctr">
-            <a:noAutofit/>
-          </a:bodyPr>
-          <a:lstStyle>
-            <a:lvl1pPr algn="ctr">
-              <a:lnSpc>
-                <a:spcPct val="100000"/>
-              </a:lnSpc>
-              <a:buNone/>
-              <a:defRPr b="0" lang="en-US" sz="1400" spc="-1" strike="noStrike">
-                <a:latin typeface="Times New Roman"/>
-              </a:defRPr>
-            </a:lvl1pPr>
-          </a:lstStyle>
-          <a:p>
-            <a:pPr algn="ctr">
-              <a:lnSpc>
-                <a:spcPct val="100000"/>
-              </a:lnSpc>
-              <a:buNone/>
-            </a:pPr>
-            <a:r>
-              <a:rPr b="0" lang="en-US" sz="1400" spc="-1" strike="noStrike">
-                <a:latin typeface="Times New Roman"/>
-              </a:rPr>
-              <a:t>&lt;footer&gt;</a:t>
-            </a:r>
-            <a:endParaRPr b="0" lang="en-US" sz="1400" spc="-1" strike="noStrike">
-              <a:latin typeface="Times New Roman"/>
-            </a:endParaRPr>
-          </a:p>
-        </p:txBody>
-      </p:sp>
-      <p:sp>
-        <p:nvSpPr>
-          <p:cNvPr id="2" name="PlaceHolder 3"/>
-          <p:cNvSpPr>
-            <a:spLocks noGrp="1"/>
-          </p:cNvSpPr>
-          <p:nvPr>
-            <p:ph type="sldNum" idx="2"/>
-          </p:nvPr>
-        </p:nvSpPr>
-        <p:spPr>
-          <a:xfrm>
-            <a:off x="6458040" y="4767120"/>
-            <a:ext cx="2056680" cy="273240"/>
-          </a:xfrm>
-          <a:prstGeom prst="rect">
-            <a:avLst/>
-          </a:prstGeom>
-          <a:noFill/>
-          <a:ln w="0">
-            <a:noFill/>
-          </a:ln>
-        </p:spPr>
-        <p:txBody>
-          <a:bodyPr lIns="90000" rIns="90000" tIns="45000" bIns="45000" anchor="ctr">
-            <a:noAutofit/>
-          </a:bodyPr>
-          <a:lstStyle>
-            <a:lvl1pPr algn="r">
-              <a:lnSpc>
-                <a:spcPct val="100000"/>
-              </a:lnSpc>
-              <a:buNone/>
-              <a:defRPr b="0" lang="en-US" sz="900" spc="-1" strike="noStrike">
-                <a:solidFill>
-                  <a:srgbClr val="8b8b8b"/>
-                </a:solidFill>
-                <a:latin typeface="Calibri"/>
-              </a:defRPr>
-            </a:lvl1pPr>
-          </a:lstStyle>
-          <a:p>
-            <a:pPr algn="r">
-              <a:lnSpc>
-                <a:spcPct val="100000"/>
-              </a:lnSpc>
-              <a:buNone/>
-            </a:pPr>
-            <a:fld id="{9231DB35-E83F-4B83-8E2C-679FD7AED6FC}" type="slidenum">
-              <a:rPr b="0" lang="en-US" sz="900" spc="-1" strike="noStrike">
-                <a:solidFill>
-                  <a:srgbClr val="8b8b8b"/>
-                </a:solidFill>
-                <a:latin typeface="Calibri"/>
-              </a:rPr>
-              <a:t>&lt;number&gt;</a:t>
-            </a:fld>
-            <a:endParaRPr b="0" lang="en-US" sz="900" spc="-1" strike="noStrike">
-              <a:latin typeface="Times New Roman"/>
-            </a:endParaRPr>
-          </a:p>
-        </p:txBody>
-      </p:sp>
-      <p:sp>
-        <p:nvSpPr>
-          <p:cNvPr id="3" name="PlaceHolder 4"/>
-          <p:cNvSpPr>
-            <a:spLocks noGrp="1"/>
-          </p:cNvSpPr>
-          <p:nvPr>
-            <p:ph type="dt" idx="3"/>
-          </p:nvPr>
-        </p:nvSpPr>
-        <p:spPr>
-          <a:xfrm>
-            <a:off x="628560" y="4767120"/>
-            <a:ext cx="2056680" cy="273240"/>
-          </a:xfrm>
-          <a:prstGeom prst="rect">
-            <a:avLst/>
-          </a:prstGeom>
-          <a:noFill/>
-          <a:ln w="0">
-            <a:noFill/>
-          </a:ln>
-        </p:spPr>
-        <p:txBody>
-          <a:bodyPr lIns="90000" rIns="90000" tIns="45000" bIns="45000" anchor="ctr">
-            <a:noAutofit/>
-          </a:bodyPr>
-          <a:lstStyle>
-            <a:lvl1pPr>
-              <a:defRPr b="0" lang="en-US" sz="1400" spc="-1" strike="noStrike">
-                <a:latin typeface="Times New Roman"/>
-              </a:defRPr>
-            </a:lvl1pPr>
-          </a:lstStyle>
-          <a:p>
-            <a:r>
-              <a:rPr b="0" lang="en-US" sz="1400" spc="-1" strike="noStrike">
-                <a:latin typeface="Times New Roman"/>
-              </a:rPr>
-              <a:t>&lt;date/time&gt;</a:t>
-            </a:r>
-            <a:endParaRPr b="0" lang="en-US" sz="1400" spc="-1" strike="noStrike">
-              <a:latin typeface="Times New Roman"/>
-            </a:endParaRPr>
-          </a:p>
-        </p:txBody>
-      </p:sp>
-      <p:sp>
-        <p:nvSpPr>
-          <p:cNvPr id="4" name="PlaceHolder 5"/>
           <p:cNvSpPr>
             <a:spLocks noGrp="1"/>
           </p:cNvSpPr>
@@ -3388,7 +3197,7 @@
         <p:spPr>
           <a:xfrm>
             <a:off x="457200" y="1203480"/>
-            <a:ext cx="8229240" cy="2982960"/>
+            <a:ext cx="8228880" cy="2982600"/>
           </a:xfrm>
           <a:prstGeom prst="rect">
             <a:avLst/>
@@ -3415,12 +3224,12 @@
               <a:buChar char=""/>
             </a:pPr>
             <a:r>
-              <a:rPr b="0" lang="en-US" sz="3200" spc="-1" strike="noStrike">
+              <a:rPr b="0" lang="en-US" sz="1800" spc="-1" strike="noStrike">
                 <a:latin typeface="Arial"/>
               </a:rPr>
               <a:t>Click to edit the outline text format</a:t>
             </a:r>
-            <a:endParaRPr b="0" lang="en-US" sz="3200" spc="-1" strike="noStrike">
+            <a:endParaRPr b="0" lang="en-US" sz="1800" spc="-1" strike="noStrike">
               <a:latin typeface="Arial"/>
             </a:endParaRPr>
           </a:p>
@@ -3437,12 +3246,12 @@
               <a:buChar char=""/>
             </a:pPr>
             <a:r>
-              <a:rPr b="0" lang="en-US" sz="2800" spc="-1" strike="noStrike">
+              <a:rPr b="0" lang="en-US" sz="1800" spc="-1" strike="noStrike">
                 <a:latin typeface="Arial"/>
               </a:rPr>
               <a:t>Second Outline Level</a:t>
             </a:r>
-            <a:endParaRPr b="0" lang="en-US" sz="2800" spc="-1" strike="noStrike">
+            <a:endParaRPr b="0" lang="en-US" sz="1800" spc="-1" strike="noStrike">
               <a:latin typeface="Arial"/>
             </a:endParaRPr>
           </a:p>
@@ -3459,12 +3268,12 @@
               <a:buChar char=""/>
             </a:pPr>
             <a:r>
-              <a:rPr b="0" lang="en-US" sz="2400" spc="-1" strike="noStrike">
+              <a:rPr b="0" lang="en-US" sz="1800" spc="-1" strike="noStrike">
                 <a:latin typeface="Arial"/>
               </a:rPr>
               <a:t>Third Outline Level</a:t>
             </a:r>
-            <a:endParaRPr b="0" lang="en-US" sz="2400" spc="-1" strike="noStrike">
+            <a:endParaRPr b="0" lang="en-US" sz="1800" spc="-1" strike="noStrike">
               <a:latin typeface="Arial"/>
             </a:endParaRPr>
           </a:p>
@@ -3481,12 +3290,12 @@
               <a:buChar char=""/>
             </a:pPr>
             <a:r>
-              <a:rPr b="0" lang="en-US" sz="2000" spc="-1" strike="noStrike">
+              <a:rPr b="0" lang="en-US" sz="1800" spc="-1" strike="noStrike">
                 <a:latin typeface="Arial"/>
               </a:rPr>
               <a:t>Fourth Outline Level</a:t>
             </a:r>
-            <a:endParaRPr b="0" lang="en-US" sz="2000" spc="-1" strike="noStrike">
+            <a:endParaRPr b="0" lang="en-US" sz="1800" spc="-1" strike="noStrike">
               <a:latin typeface="Arial"/>
             </a:endParaRPr>
           </a:p>
@@ -3503,12 +3312,12 @@
               <a:buChar char=""/>
             </a:pPr>
             <a:r>
-              <a:rPr b="0" lang="en-US" sz="2000" spc="-1" strike="noStrike">
+              <a:rPr b="0" lang="en-US" sz="1800" spc="-1" strike="noStrike">
                 <a:latin typeface="Arial"/>
               </a:rPr>
               <a:t>Fifth Outline Level</a:t>
             </a:r>
-            <a:endParaRPr b="0" lang="en-US" sz="2000" spc="-1" strike="noStrike">
+            <a:endParaRPr b="0" lang="en-US" sz="1800" spc="-1" strike="noStrike">
               <a:latin typeface="Arial"/>
             </a:endParaRPr>
           </a:p>
@@ -3525,12 +3334,12 @@
               <a:buChar char=""/>
             </a:pPr>
             <a:r>
-              <a:rPr b="0" lang="en-US" sz="2000" spc="-1" strike="noStrike">
+              <a:rPr b="0" lang="en-US" sz="1800" spc="-1" strike="noStrike">
                 <a:latin typeface="Arial"/>
               </a:rPr>
               <a:t>Sixth Outline Level</a:t>
             </a:r>
-            <a:endParaRPr b="0" lang="en-US" sz="2000" spc="-1" strike="noStrike">
+            <a:endParaRPr b="0" lang="en-US" sz="1800" spc="-1" strike="noStrike">
               <a:latin typeface="Arial"/>
             </a:endParaRPr>
           </a:p>
@@ -3547,13 +3356,180 @@
               <a:buChar char=""/>
             </a:pPr>
             <a:r>
-              <a:rPr b="0" lang="en-US" sz="2000" spc="-1" strike="noStrike">
+              <a:rPr b="0" lang="en-US" sz="1800" spc="-1" strike="noStrike">
                 <a:latin typeface="Arial"/>
               </a:rPr>
               <a:t>Seventh Outline Level</a:t>
             </a:r>
-            <a:endParaRPr b="0" lang="en-US" sz="2000" spc="-1" strike="noStrike">
-              <a:latin typeface="Arial"/>
+            <a:endParaRPr b="0" lang="en-US" sz="1800" spc="-1" strike="noStrike">
+              <a:latin typeface="Arial"/>
+            </a:endParaRPr>
+          </a:p>
+        </p:txBody>
+      </p:sp>
+      <p:sp>
+        <p:nvSpPr>
+          <p:cNvPr id="2" name="PlaceHolder 3"/>
+          <p:cNvSpPr>
+            <a:spLocks noGrp="1"/>
+          </p:cNvSpPr>
+          <p:nvPr>
+            <p:ph type="ftr" idx="1"/>
+          </p:nvPr>
+        </p:nvSpPr>
+        <p:spPr>
+          <a:xfrm>
+            <a:off x="3029040" y="4767120"/>
+            <a:ext cx="3085200" cy="272880"/>
+          </a:xfrm>
+          <a:prstGeom prst="rect">
+            <a:avLst/>
+          </a:prstGeom>
+          <a:noFill/>
+          <a:ln w="0">
+            <a:noFill/>
+          </a:ln>
+        </p:spPr>
+        <p:txBody>
+          <a:bodyPr lIns="90000" rIns="90000" tIns="45000" bIns="45000" anchor="ctr">
+            <a:noAutofit/>
+          </a:bodyPr>
+          <a:lstStyle>
+            <a:lvl1pPr algn="ctr">
+              <a:lnSpc>
+                <a:spcPct val="100000"/>
+              </a:lnSpc>
+              <a:buNone/>
+              <a:defRPr b="0" lang="en-US" sz="1400" spc="-1" strike="noStrike">
+                <a:latin typeface="Times New Roman"/>
+              </a:defRPr>
+            </a:lvl1pPr>
+          </a:lstStyle>
+          <a:p>
+            <a:pPr algn="ctr">
+              <a:lnSpc>
+                <a:spcPct val="100000"/>
+              </a:lnSpc>
+              <a:buNone/>
+            </a:pPr>
+            <a:r>
+              <a:rPr b="0" lang="en-US" sz="1400" spc="-1" strike="noStrike">
+                <a:latin typeface="Times New Roman"/>
+              </a:rPr>
+              <a:t>&lt;footer&gt;</a:t>
+            </a:r>
+            <a:endParaRPr b="0" lang="en-US" sz="1400" spc="-1" strike="noStrike">
+              <a:latin typeface="Times New Roman"/>
+            </a:endParaRPr>
+          </a:p>
+        </p:txBody>
+      </p:sp>
+      <p:sp>
+        <p:nvSpPr>
+          <p:cNvPr id="3" name="PlaceHolder 4"/>
+          <p:cNvSpPr>
+            <a:spLocks noGrp="1"/>
+          </p:cNvSpPr>
+          <p:nvPr>
+            <p:ph type="sldNum" idx="2"/>
+          </p:nvPr>
+        </p:nvSpPr>
+        <p:spPr>
+          <a:xfrm>
+            <a:off x="6458040" y="4767120"/>
+            <a:ext cx="2056320" cy="272880"/>
+          </a:xfrm>
+          <a:prstGeom prst="rect">
+            <a:avLst/>
+          </a:prstGeom>
+          <a:noFill/>
+          <a:ln w="0">
+            <a:noFill/>
+          </a:ln>
+        </p:spPr>
+        <p:txBody>
+          <a:bodyPr lIns="90000" rIns="90000" tIns="45000" bIns="45000" anchor="ctr">
+            <a:noAutofit/>
+          </a:bodyPr>
+          <a:lstStyle>
+            <a:lvl1pPr algn="r">
+              <a:lnSpc>
+                <a:spcPct val="100000"/>
+              </a:lnSpc>
+              <a:buNone/>
+              <a:defRPr b="0" lang="en-US" sz="900" spc="-1" strike="noStrike">
+                <a:solidFill>
+                  <a:srgbClr val="8b8b8b"/>
+                </a:solidFill>
+                <a:latin typeface="Calibri"/>
+              </a:defRPr>
+            </a:lvl1pPr>
+          </a:lstStyle>
+          <a:p>
+            <a:pPr algn="r">
+              <a:lnSpc>
+                <a:spcPct val="100000"/>
+              </a:lnSpc>
+              <a:buNone/>
+            </a:pPr>
+            <a:fld id="{346122F2-73D4-4A78-883B-F86413C8E850}" type="slidenum">
+              <a:rPr b="0" lang="en-US" sz="900" spc="-1" strike="noStrike">
+                <a:solidFill>
+                  <a:srgbClr val="8b8b8b"/>
+                </a:solidFill>
+                <a:latin typeface="Calibri"/>
+              </a:rPr>
+              <a:t>&lt;number&gt;</a:t>
+            </a:fld>
+            <a:endParaRPr b="0" lang="en-US" sz="900" spc="-1" strike="noStrike">
+              <a:latin typeface="Times New Roman"/>
+            </a:endParaRPr>
+          </a:p>
+        </p:txBody>
+      </p:sp>
+      <p:sp>
+        <p:nvSpPr>
+          <p:cNvPr id="4" name="PlaceHolder 5"/>
+          <p:cNvSpPr>
+            <a:spLocks noGrp="1"/>
+          </p:cNvSpPr>
+          <p:nvPr>
+            <p:ph type="dt" idx="3"/>
+          </p:nvPr>
+        </p:nvSpPr>
+        <p:spPr>
+          <a:xfrm>
+            <a:off x="628560" y="4767120"/>
+            <a:ext cx="2056320" cy="272880"/>
+          </a:xfrm>
+          <a:prstGeom prst="rect">
+            <a:avLst/>
+          </a:prstGeom>
+          <a:noFill/>
+          <a:ln w="0">
+            <a:noFill/>
+          </a:ln>
+        </p:spPr>
+        <p:txBody>
+          <a:bodyPr lIns="90000" rIns="90000" tIns="45000" bIns="45000" anchor="ctr">
+            <a:noAutofit/>
+          </a:bodyPr>
+          <a:lstStyle>
+            <a:lvl1pPr>
+              <a:defRPr b="0" lang="en-US" sz="1400" spc="-1" strike="noStrike">
+                <a:latin typeface="Times New Roman"/>
+              </a:defRPr>
+            </a:lvl1pPr>
+          </a:lstStyle>
+          <a:p>
+            <a:r>
+              <a:rPr b="0" lang="en-US" sz="1400" spc="-1" strike="noStrike">
+                <a:latin typeface="Times New Roman"/>
+              </a:rPr>
+              <a:t>&lt;date/time&gt;</a:t>
+            </a:r>
+            <a:endParaRPr b="0" lang="en-US" sz="1400" spc="-1" strike="noStrike">
+              <a:latin typeface="Times New Roman"/>
             </a:endParaRPr>
           </a:p>
         </p:txBody>
@@ -3604,7 +3580,7 @@
         <p:spPr>
           <a:xfrm>
             <a:off x="186840" y="178200"/>
-            <a:ext cx="8769960" cy="4757760"/>
+            <a:ext cx="8769600" cy="4757400"/>
           </a:xfrm>
           <a:prstGeom prst="roundRect">
             <a:avLst>
@@ -3642,7 +3618,7 @@
         <p:spPr>
           <a:xfrm>
             <a:off x="460080" y="4445640"/>
-            <a:ext cx="2998800" cy="269280"/>
+            <a:ext cx="2998440" cy="268920"/>
           </a:xfrm>
           <a:prstGeom prst="rect">
             <a:avLst/>
@@ -3708,7 +3684,7 @@
         <p:spPr>
           <a:xfrm>
             <a:off x="2423160" y="4446360"/>
-            <a:ext cx="290880" cy="290880"/>
+            <a:ext cx="290520" cy="290520"/>
           </a:xfrm>
           <a:prstGeom prst="rect">
             <a:avLst/>
@@ -3727,7 +3703,7 @@
         <p:spPr>
           <a:xfrm>
             <a:off x="460080" y="622080"/>
-            <a:ext cx="6925680" cy="3306600"/>
+            <a:ext cx="6925320" cy="3306240"/>
           </a:xfrm>
           <a:prstGeom prst="rect">
             <a:avLst/>
@@ -3783,7 +3759,7 @@
         <p:spPr>
           <a:xfrm>
             <a:off x="5753880" y="2557440"/>
-            <a:ext cx="4009680" cy="3133080"/>
+            <a:ext cx="4009320" cy="3132720"/>
           </a:xfrm>
           <a:prstGeom prst="rect">
             <a:avLst/>
@@ -3832,7 +3808,7 @@
         <p:spPr>
           <a:xfrm>
             <a:off x="0" y="-478800"/>
-            <a:ext cx="9143280" cy="1765800"/>
+            <a:ext cx="9142920" cy="1765440"/>
           </a:xfrm>
           <a:prstGeom prst="roundRect">
             <a:avLst>
@@ -3870,7 +3846,7 @@
         <p:spPr>
           <a:xfrm>
             <a:off x="384840" y="1726200"/>
-            <a:ext cx="2664720" cy="713520"/>
+            <a:ext cx="2664360" cy="713160"/>
           </a:xfrm>
           <a:prstGeom prst="rect">
             <a:avLst/>
@@ -3922,7 +3898,7 @@
         <p:spPr>
           <a:xfrm>
             <a:off x="384840" y="2611080"/>
-            <a:ext cx="2664720" cy="1564920"/>
+            <a:ext cx="2664360" cy="1564560"/>
           </a:xfrm>
           <a:prstGeom prst="rect">
             <a:avLst/>
@@ -3984,7 +3960,7 @@
         <p:spPr>
           <a:xfrm>
             <a:off x="3239280" y="1726200"/>
-            <a:ext cx="2664720" cy="713520"/>
+            <a:ext cx="2664360" cy="713160"/>
           </a:xfrm>
           <a:prstGeom prst="rect">
             <a:avLst/>
@@ -4036,7 +4012,7 @@
         <p:spPr>
           <a:xfrm>
             <a:off x="3239280" y="2611080"/>
-            <a:ext cx="2664720" cy="1564920"/>
+            <a:ext cx="2664360" cy="1564560"/>
           </a:xfrm>
           <a:prstGeom prst="rect">
             <a:avLst/>
@@ -4098,7 +4074,7 @@
         <p:spPr>
           <a:xfrm>
             <a:off x="6093720" y="1726200"/>
-            <a:ext cx="2664720" cy="713520"/>
+            <a:ext cx="2664360" cy="713160"/>
           </a:xfrm>
           <a:prstGeom prst="rect">
             <a:avLst/>
@@ -4150,7 +4126,7 @@
         <p:spPr>
           <a:xfrm>
             <a:off x="6093720" y="2611080"/>
-            <a:ext cx="2664720" cy="1564920"/>
+            <a:ext cx="2664360" cy="1564560"/>
           </a:xfrm>
           <a:prstGeom prst="rect">
             <a:avLst/>
@@ -4311,7 +4287,7 @@
         <p:spPr>
           <a:xfrm>
             <a:off x="8519760" y="4831560"/>
-            <a:ext cx="484560" cy="226800"/>
+            <a:ext cx="484200" cy="226800"/>
           </a:xfrm>
           <a:prstGeom prst="rect">
             <a:avLst/>
@@ -4363,7 +4339,7 @@
         <p:spPr>
           <a:xfrm>
             <a:off x="313200" y="156600"/>
-            <a:ext cx="8457840" cy="757440"/>
+            <a:ext cx="8457480" cy="757080"/>
           </a:xfrm>
           <a:prstGeom prst="rect">
             <a:avLst/>
@@ -4392,7 +4368,11 @@
             </a:pPr>
             <a:r>
               <a:rPr b="0" lang="en-US" sz="1800" spc="-1" strike="noStrike">
-                <a:latin typeface="Arial"/>
+                <a:solidFill>
+                  <a:srgbClr val="000000"/>
+                </a:solidFill>
+                <a:latin typeface="Arial"/>
+                <a:ea typeface="DejaVu Sans"/>
               </a:rPr>
               <a:t>TITLE</a:t>
             </a:r>
@@ -4441,7 +4421,7 @@
         <p:spPr>
           <a:xfrm>
             <a:off x="186840" y="178200"/>
-            <a:ext cx="8769960" cy="4757760"/>
+            <a:ext cx="8769600" cy="4757400"/>
           </a:xfrm>
           <a:prstGeom prst="roundRect">
             <a:avLst>
@@ -4479,7 +4459,7 @@
         <p:spPr>
           <a:xfrm>
             <a:off x="1640880" y="4489920"/>
-            <a:ext cx="2998800" cy="269280"/>
+            <a:ext cx="2998440" cy="268920"/>
           </a:xfrm>
           <a:prstGeom prst="rect">
             <a:avLst/>
@@ -4541,7 +4521,7 @@
         <p:spPr>
           <a:xfrm>
             <a:off x="867240" y="3488040"/>
-            <a:ext cx="256680" cy="256680"/>
+            <a:ext cx="256320" cy="256320"/>
           </a:xfrm>
           <a:prstGeom prst="ellipse">
             <a:avLst/>
@@ -4576,7 +4556,7 @@
         <p:spPr>
           <a:xfrm>
             <a:off x="351000" y="3691440"/>
-            <a:ext cx="1289160" cy="1133280"/>
+            <a:ext cx="1288800" cy="1132920"/>
           </a:xfrm>
           <a:prstGeom prst="rect">
             <a:avLst/>
@@ -4595,7 +4575,7 @@
         <p:spPr>
           <a:xfrm>
             <a:off x="460080" y="622080"/>
-            <a:ext cx="6925680" cy="3306600"/>
+            <a:ext cx="6925320" cy="3306240"/>
           </a:xfrm>
           <a:prstGeom prst="rect">
             <a:avLst/>
@@ -4651,7 +4631,7 @@
         <p:spPr>
           <a:xfrm>
             <a:off x="5753880" y="2557440"/>
-            <a:ext cx="4009680" cy="3133080"/>
+            <a:ext cx="4009320" cy="3132720"/>
           </a:xfrm>
           <a:prstGeom prst="rect">
             <a:avLst/>
@@ -4704,7 +4684,7 @@
         <p:spPr>
           <a:xfrm>
             <a:off x="5753880" y="2557440"/>
-            <a:ext cx="4009680" cy="3133080"/>
+            <a:ext cx="4009320" cy="3132720"/>
           </a:xfrm>
           <a:prstGeom prst="rect">
             <a:avLst/>
@@ -4723,7 +4703,7 @@
         <p:spPr>
           <a:xfrm>
             <a:off x="185760" y="831240"/>
-            <a:ext cx="899280" cy="899280"/>
+            <a:ext cx="898920" cy="898920"/>
           </a:xfrm>
           <a:prstGeom prst="ellipse">
             <a:avLst/>
@@ -4783,7 +4763,7 @@
         <p:spPr>
           <a:xfrm>
             <a:off x="185760" y="2381400"/>
-            <a:ext cx="899280" cy="887400"/>
+            <a:ext cx="898920" cy="887040"/>
           </a:xfrm>
           <a:prstGeom prst="ellipse">
             <a:avLst/>
@@ -4843,7 +4823,7 @@
         <p:spPr>
           <a:xfrm>
             <a:off x="185760" y="3860640"/>
-            <a:ext cx="899280" cy="899280"/>
+            <a:ext cx="898920" cy="898920"/>
           </a:xfrm>
           <a:prstGeom prst="ellipse">
             <a:avLst/>
@@ -4903,7 +4883,7 @@
         <p:spPr>
           <a:xfrm>
             <a:off x="967680" y="797040"/>
-            <a:ext cx="3764520" cy="550440"/>
+            <a:ext cx="3764160" cy="550080"/>
           </a:xfrm>
           <a:prstGeom prst="rect">
             <a:avLst/>
@@ -4965,7 +4945,7 @@
         <p:spPr>
           <a:xfrm>
             <a:off x="967680" y="1332720"/>
-            <a:ext cx="3764520" cy="789480"/>
+            <a:ext cx="3764160" cy="789120"/>
           </a:xfrm>
           <a:prstGeom prst="rect">
             <a:avLst/>
@@ -5027,7 +5007,7 @@
         <p:spPr>
           <a:xfrm>
             <a:off x="964080" y="2292480"/>
-            <a:ext cx="3764520" cy="550440"/>
+            <a:ext cx="3764160" cy="550080"/>
           </a:xfrm>
           <a:prstGeom prst="rect">
             <a:avLst/>
@@ -5079,7 +5059,7 @@
         <p:spPr>
           <a:xfrm>
             <a:off x="964080" y="2825280"/>
-            <a:ext cx="3764520" cy="843120"/>
+            <a:ext cx="3764160" cy="842760"/>
           </a:xfrm>
           <a:prstGeom prst="rect">
             <a:avLst/>
@@ -5141,7 +5121,7 @@
         <p:spPr>
           <a:xfrm>
             <a:off x="964080" y="3777840"/>
-            <a:ext cx="3764520" cy="550440"/>
+            <a:ext cx="3764160" cy="550080"/>
           </a:xfrm>
           <a:prstGeom prst="rect">
             <a:avLst/>
@@ -5193,7 +5173,7 @@
         <p:spPr>
           <a:xfrm>
             <a:off x="964080" y="4310640"/>
-            <a:ext cx="3764520" cy="794520"/>
+            <a:ext cx="3764160" cy="794160"/>
           </a:xfrm>
           <a:prstGeom prst="rect">
             <a:avLst/>
@@ -5255,7 +5235,7 @@
         <p:spPr>
           <a:xfrm>
             <a:off x="5084640" y="987840"/>
-            <a:ext cx="3687480" cy="3496680"/>
+            <a:ext cx="3687120" cy="3496320"/>
           </a:xfrm>
           <a:prstGeom prst="roundRect">
             <a:avLst>
@@ -5319,7 +5299,7 @@
         <p:spPr>
           <a:xfrm>
             <a:off x="8519760" y="4831560"/>
-            <a:ext cx="484560" cy="226800"/>
+            <a:ext cx="484200" cy="226800"/>
           </a:xfrm>
           <a:prstGeom prst="rect">
             <a:avLst/>
@@ -5371,7 +5351,7 @@
         <p:spPr>
           <a:xfrm>
             <a:off x="421200" y="228600"/>
-            <a:ext cx="8457840" cy="685440"/>
+            <a:ext cx="8457480" cy="685080"/>
           </a:xfrm>
           <a:prstGeom prst="rect">
             <a:avLst/>
@@ -5400,7 +5380,11 @@
             </a:pPr>
             <a:r>
               <a:rPr b="0" lang="en-US" sz="1800" spc="-1" strike="noStrike">
-                <a:latin typeface="Arial"/>
+                <a:solidFill>
+                  <a:srgbClr val="000000"/>
+                </a:solidFill>
+                <a:latin typeface="Arial"/>
+                <a:ea typeface="DejaVu Sans"/>
               </a:rPr>
               <a:t>TITLE</a:t>
             </a:r>
@@ -5449,7 +5433,7 @@
         <p:spPr>
           <a:xfrm>
             <a:off x="506520" y="1484640"/>
-            <a:ext cx="2556720" cy="2055240"/>
+            <a:ext cx="2556360" cy="2054880"/>
           </a:xfrm>
           <a:prstGeom prst="roundRect">
             <a:avLst>
@@ -5489,7 +5473,7 @@
         <p:spPr>
           <a:xfrm>
             <a:off x="624240" y="1616760"/>
-            <a:ext cx="2289600" cy="729000"/>
+            <a:ext cx="2289240" cy="728640"/>
           </a:xfrm>
           <a:prstGeom prst="rect">
             <a:avLst/>
@@ -5541,7 +5525,7 @@
         <p:spPr>
           <a:xfrm>
             <a:off x="624240" y="2400480"/>
-            <a:ext cx="2289600" cy="1162080"/>
+            <a:ext cx="2289240" cy="1161720"/>
           </a:xfrm>
           <a:prstGeom prst="rect">
             <a:avLst/>
@@ -5603,7 +5587,7 @@
         <p:spPr>
           <a:xfrm>
             <a:off x="3309120" y="2066040"/>
-            <a:ext cx="2556720" cy="2055240"/>
+            <a:ext cx="2556360" cy="2054880"/>
           </a:xfrm>
           <a:prstGeom prst="roundRect">
             <a:avLst>
@@ -5643,7 +5627,7 @@
         <p:spPr>
           <a:xfrm>
             <a:off x="3426840" y="2198160"/>
-            <a:ext cx="2289600" cy="729000"/>
+            <a:ext cx="2289240" cy="728640"/>
           </a:xfrm>
           <a:prstGeom prst="rect">
             <a:avLst/>
@@ -5695,7 +5679,7 @@
         <p:spPr>
           <a:xfrm>
             <a:off x="3426840" y="2981880"/>
-            <a:ext cx="2289600" cy="1162080"/>
+            <a:ext cx="2289240" cy="1161720"/>
           </a:xfrm>
           <a:prstGeom prst="rect">
             <a:avLst/>
@@ -5747,7 +5731,7 @@
         <p:spPr>
           <a:xfrm>
             <a:off x="6111720" y="2659320"/>
-            <a:ext cx="2556720" cy="2055240"/>
+            <a:ext cx="2556360" cy="2054880"/>
           </a:xfrm>
           <a:prstGeom prst="roundRect">
             <a:avLst>
@@ -5787,7 +5771,7 @@
         <p:spPr>
           <a:xfrm>
             <a:off x="6229440" y="2791440"/>
-            <a:ext cx="2289600" cy="729000"/>
+            <a:ext cx="2289240" cy="728640"/>
           </a:xfrm>
           <a:prstGeom prst="rect">
             <a:avLst/>
@@ -5822,7 +5806,7 @@
                 <a:latin typeface="Arial"/>
                 <a:ea typeface="DejaVu Sans"/>
               </a:rPr>
-              <a:t>SUBTITLE2</a:t>
+              <a:t>SUBTITLE3</a:t>
             </a:r>
             <a:endParaRPr b="0" lang="en-US" sz="1400" spc="-1" strike="noStrike">
               <a:latin typeface="Arial"/>
@@ -5839,7 +5823,7 @@
         <p:spPr>
           <a:xfrm>
             <a:off x="6229440" y="3574800"/>
-            <a:ext cx="2289600" cy="1162080"/>
+            <a:ext cx="2289240" cy="1161720"/>
           </a:xfrm>
           <a:prstGeom prst="rect">
             <a:avLst/>
@@ -5874,7 +5858,7 @@
                 <a:latin typeface="Arial"/>
                 <a:ea typeface="DejaVu Sans"/>
               </a:rPr>
-              <a:t>TEXT2</a:t>
+              <a:t>TEXT3</a:t>
             </a:r>
             <a:endParaRPr b="0" lang="en-US" sz="1100" spc="-1" strike="noStrike">
               <a:latin typeface="Arial"/>
@@ -5891,7 +5875,7 @@
         <p:spPr>
           <a:xfrm>
             <a:off x="8519760" y="4831560"/>
-            <a:ext cx="484560" cy="226800"/>
+            <a:ext cx="484200" cy="226800"/>
           </a:xfrm>
           <a:prstGeom prst="rect">
             <a:avLst/>
@@ -5943,7 +5927,7 @@
         <p:spPr>
           <a:xfrm>
             <a:off x="457200" y="228600"/>
-            <a:ext cx="8229240" cy="1142640"/>
+            <a:ext cx="8228880" cy="1142280"/>
           </a:xfrm>
           <a:prstGeom prst="rect">
             <a:avLst/>
@@ -5972,7 +5956,11 @@
             </a:pPr>
             <a:r>
               <a:rPr b="0" lang="en-US" sz="1800" spc="-1" strike="noStrike">
-                <a:latin typeface="Arial"/>
+                <a:solidFill>
+                  <a:srgbClr val="000000"/>
+                </a:solidFill>
+                <a:latin typeface="Arial"/>
+                <a:ea typeface="DejaVu Sans"/>
               </a:rPr>
               <a:t>TITLE</a:t>
             </a:r>
@@ -6021,7 +6009,7 @@
         <p:spPr>
           <a:xfrm>
             <a:off x="3601800" y="3271680"/>
-            <a:ext cx="5236200" cy="1320840"/>
+            <a:ext cx="5235840" cy="1320480"/>
           </a:xfrm>
           <a:prstGeom prst="roundRect">
             <a:avLst>
@@ -6059,7 +6047,7 @@
         <p:spPr>
           <a:xfrm>
             <a:off x="6308640" y="1028880"/>
-            <a:ext cx="2532960" cy="2056680"/>
+            <a:ext cx="2532600" cy="2056320"/>
           </a:xfrm>
           <a:prstGeom prst="roundRect">
             <a:avLst>
@@ -6097,7 +6085,7 @@
         <p:spPr>
           <a:xfrm>
             <a:off x="3604320" y="1014480"/>
-            <a:ext cx="2532960" cy="2056680"/>
+            <a:ext cx="2532600" cy="2056320"/>
           </a:xfrm>
           <a:prstGeom prst="roundRect">
             <a:avLst>
@@ -6135,7 +6123,7 @@
         <p:spPr>
           <a:xfrm>
             <a:off x="3696480" y="1059120"/>
-            <a:ext cx="2343240" cy="713520"/>
+            <a:ext cx="2342880" cy="713160"/>
           </a:xfrm>
           <a:prstGeom prst="rect">
             <a:avLst/>
@@ -6197,7 +6185,7 @@
         <p:spPr>
           <a:xfrm>
             <a:off x="3696480" y="1843560"/>
-            <a:ext cx="2343240" cy="1141920"/>
+            <a:ext cx="2342880" cy="1141560"/>
           </a:xfrm>
           <a:prstGeom prst="rect">
             <a:avLst/>
@@ -6259,7 +6247,7 @@
         <p:spPr>
           <a:xfrm>
             <a:off x="6400080" y="1059120"/>
-            <a:ext cx="2340000" cy="713520"/>
+            <a:ext cx="2339640" cy="713160"/>
           </a:xfrm>
           <a:prstGeom prst="rect">
             <a:avLst/>
@@ -6311,7 +6299,7 @@
         <p:spPr>
           <a:xfrm>
             <a:off x="6400080" y="1843560"/>
-            <a:ext cx="2340000" cy="1141920"/>
+            <a:ext cx="2339640" cy="1141560"/>
           </a:xfrm>
           <a:prstGeom prst="rect">
             <a:avLst/>
@@ -6373,7 +6361,7 @@
         <p:spPr>
           <a:xfrm>
             <a:off x="3696480" y="3362040"/>
-            <a:ext cx="5236200" cy="328680"/>
+            <a:ext cx="5235840" cy="328320"/>
           </a:xfrm>
           <a:prstGeom prst="rect">
             <a:avLst/>
@@ -6425,7 +6413,7 @@
         <p:spPr>
           <a:xfrm>
             <a:off x="3696480" y="3713400"/>
-            <a:ext cx="5146560" cy="713520"/>
+            <a:ext cx="5146200" cy="713160"/>
           </a:xfrm>
           <a:prstGeom prst="rect">
             <a:avLst/>
@@ -6487,7 +6475,7 @@
         <p:spPr>
           <a:xfrm>
             <a:off x="384840" y="1028880"/>
-            <a:ext cx="3002400" cy="3564000"/>
+            <a:ext cx="3002040" cy="3563640"/>
           </a:xfrm>
           <a:prstGeom prst="roundRect">
             <a:avLst>
@@ -6551,7 +6539,7 @@
         <p:spPr>
           <a:xfrm>
             <a:off x="8519760" y="4831560"/>
-            <a:ext cx="484560" cy="226800"/>
+            <a:ext cx="484200" cy="226800"/>
           </a:xfrm>
           <a:prstGeom prst="rect">
             <a:avLst/>
@@ -6603,7 +6591,7 @@
         <p:spPr>
           <a:xfrm>
             <a:off x="313200" y="228600"/>
-            <a:ext cx="8457840" cy="685440"/>
+            <a:ext cx="8457480" cy="685080"/>
           </a:xfrm>
           <a:prstGeom prst="rect">
             <a:avLst/>
@@ -6632,7 +6620,11 @@
             </a:pPr>
             <a:r>
               <a:rPr b="0" lang="en-US" sz="1800" spc="-1" strike="noStrike">
-                <a:latin typeface="Arial"/>
+                <a:solidFill>
+                  <a:srgbClr val="000000"/>
+                </a:solidFill>
+                <a:latin typeface="Arial"/>
+                <a:ea typeface="DejaVu Sans"/>
               </a:rPr>
               <a:t>TITLE</a:t>
             </a:r>
@@ -6685,7 +6677,7 @@
         <p:spPr>
           <a:xfrm>
             <a:off x="-877680" y="2245320"/>
-            <a:ext cx="4613040" cy="3604680"/>
+            <a:ext cx="4612680" cy="3604320"/>
           </a:xfrm>
           <a:prstGeom prst="rect">
             <a:avLst/>
@@ -6704,7 +6696,7 @@
         <p:spPr>
           <a:xfrm>
             <a:off x="4157640" y="631080"/>
-            <a:ext cx="899280" cy="899280"/>
+            <a:ext cx="898920" cy="898920"/>
           </a:xfrm>
           <a:prstGeom prst="ellipse">
             <a:avLst/>
@@ -6766,7 +6758,7 @@
         <p:spPr>
           <a:xfrm>
             <a:off x="4157640" y="2127600"/>
-            <a:ext cx="899280" cy="887400"/>
+            <a:ext cx="898920" cy="887040"/>
           </a:xfrm>
           <a:prstGeom prst="ellipse">
             <a:avLst/>
@@ -6828,7 +6820,7 @@
         <p:spPr>
           <a:xfrm>
             <a:off x="4157640" y="3612240"/>
-            <a:ext cx="899280" cy="899280"/>
+            <a:ext cx="898920" cy="898920"/>
           </a:xfrm>
           <a:prstGeom prst="ellipse">
             <a:avLst/>
@@ -6890,7 +6882,7 @@
         <p:spPr>
           <a:xfrm>
             <a:off x="5146560" y="489600"/>
-            <a:ext cx="3578760" cy="550440"/>
+            <a:ext cx="3578400" cy="550080"/>
           </a:xfrm>
           <a:prstGeom prst="rect">
             <a:avLst/>
@@ -6952,7 +6944,7 @@
         <p:spPr>
           <a:xfrm>
             <a:off x="5146560" y="1025280"/>
-            <a:ext cx="3578760" cy="789480"/>
+            <a:ext cx="3578400" cy="789120"/>
           </a:xfrm>
           <a:prstGeom prst="rect">
             <a:avLst/>
@@ -7014,7 +7006,7 @@
         <p:spPr>
           <a:xfrm>
             <a:off x="5142960" y="1985400"/>
-            <a:ext cx="3578760" cy="550440"/>
+            <a:ext cx="3578400" cy="550080"/>
           </a:xfrm>
           <a:prstGeom prst="rect">
             <a:avLst/>
@@ -7066,7 +7058,7 @@
         <p:spPr>
           <a:xfrm>
             <a:off x="5142960" y="2517840"/>
-            <a:ext cx="3578760" cy="843120"/>
+            <a:ext cx="3578400" cy="842760"/>
           </a:xfrm>
           <a:prstGeom prst="rect">
             <a:avLst/>
@@ -7128,7 +7120,7 @@
         <p:spPr>
           <a:xfrm>
             <a:off x="5142960" y="3470760"/>
-            <a:ext cx="3578760" cy="550440"/>
+            <a:ext cx="3578400" cy="550080"/>
           </a:xfrm>
           <a:prstGeom prst="rect">
             <a:avLst/>
@@ -7180,7 +7172,7 @@
         <p:spPr>
           <a:xfrm>
             <a:off x="5142960" y="4003560"/>
-            <a:ext cx="3578760" cy="794520"/>
+            <a:ext cx="3578400" cy="794160"/>
           </a:xfrm>
           <a:prstGeom prst="rect">
             <a:avLst/>
@@ -7242,7 +7234,7 @@
         <p:spPr>
           <a:xfrm>
             <a:off x="8519760" y="4831560"/>
-            <a:ext cx="484560" cy="226800"/>
+            <a:ext cx="484200" cy="226800"/>
           </a:xfrm>
           <a:prstGeom prst="rect">
             <a:avLst/>
@@ -7294,7 +7286,7 @@
         <p:spPr>
           <a:xfrm>
             <a:off x="264600" y="228600"/>
-            <a:ext cx="3657240" cy="2016360"/>
+            <a:ext cx="3656880" cy="2016000"/>
           </a:xfrm>
           <a:prstGeom prst="rect">
             <a:avLst/>
@@ -7323,7 +7315,11 @@
             </a:pPr>
             <a:r>
               <a:rPr b="0" lang="en-US" sz="1800" spc="-1" strike="noStrike">
-                <a:latin typeface="Arial"/>
+                <a:solidFill>
+                  <a:srgbClr val="000000"/>
+                </a:solidFill>
+                <a:latin typeface="Arial"/>
+                <a:ea typeface="DejaVu Sans"/>
               </a:rPr>
               <a:t>TITLE</a:t>
             </a:r>
@@ -7372,7 +7368,7 @@
         <p:spPr>
           <a:xfrm>
             <a:off x="4238640" y="831240"/>
-            <a:ext cx="899280" cy="899280"/>
+            <a:ext cx="898920" cy="898920"/>
           </a:xfrm>
           <a:prstGeom prst="ellipse">
             <a:avLst/>
@@ -7432,7 +7428,7 @@
         <p:spPr>
           <a:xfrm>
             <a:off x="4238640" y="2243880"/>
-            <a:ext cx="899280" cy="887400"/>
+            <a:ext cx="898920" cy="887040"/>
           </a:xfrm>
           <a:prstGeom prst="ellipse">
             <a:avLst/>
@@ -7492,7 +7488,7 @@
         <p:spPr>
           <a:xfrm>
             <a:off x="4238640" y="3667320"/>
-            <a:ext cx="899280" cy="899280"/>
+            <a:ext cx="898920" cy="898920"/>
           </a:xfrm>
           <a:prstGeom prst="ellipse">
             <a:avLst/>
@@ -7552,7 +7548,7 @@
         <p:spPr>
           <a:xfrm>
             <a:off x="5020200" y="797040"/>
-            <a:ext cx="3764520" cy="550440"/>
+            <a:ext cx="3764160" cy="550080"/>
           </a:xfrm>
           <a:prstGeom prst="rect">
             <a:avLst/>
@@ -7614,7 +7610,7 @@
         <p:spPr>
           <a:xfrm>
             <a:off x="5020200" y="1332720"/>
-            <a:ext cx="3764520" cy="789480"/>
+            <a:ext cx="3764160" cy="789120"/>
           </a:xfrm>
           <a:prstGeom prst="rect">
             <a:avLst/>
@@ -7676,7 +7672,7 @@
         <p:spPr>
           <a:xfrm>
             <a:off x="5016600" y="2155320"/>
-            <a:ext cx="3764520" cy="550440"/>
+            <a:ext cx="3764160" cy="550080"/>
           </a:xfrm>
           <a:prstGeom prst="rect">
             <a:avLst/>
@@ -7728,7 +7724,7 @@
         <p:spPr>
           <a:xfrm>
             <a:off x="5016600" y="2687760"/>
-            <a:ext cx="3764520" cy="843120"/>
+            <a:ext cx="3764160" cy="842760"/>
           </a:xfrm>
           <a:prstGeom prst="rect">
             <a:avLst/>
@@ -7790,7 +7786,7 @@
         <p:spPr>
           <a:xfrm>
             <a:off x="5016600" y="3584880"/>
-            <a:ext cx="3764520" cy="550440"/>
+            <a:ext cx="3764160" cy="550080"/>
           </a:xfrm>
           <a:prstGeom prst="rect">
             <a:avLst/>
@@ -7842,7 +7838,7 @@
         <p:spPr>
           <a:xfrm>
             <a:off x="5016600" y="4117320"/>
-            <a:ext cx="3764520" cy="794520"/>
+            <a:ext cx="3764160" cy="794160"/>
           </a:xfrm>
           <a:prstGeom prst="rect">
             <a:avLst/>
@@ -7904,7 +7900,7 @@
         <p:spPr>
           <a:xfrm>
             <a:off x="384840" y="987840"/>
-            <a:ext cx="3687480" cy="3496680"/>
+            <a:ext cx="3687120" cy="3496320"/>
           </a:xfrm>
           <a:prstGeom prst="roundRect">
             <a:avLst>
@@ -7968,7 +7964,7 @@
         <p:spPr>
           <a:xfrm>
             <a:off x="8519760" y="4831560"/>
-            <a:ext cx="484560" cy="226800"/>
+            <a:ext cx="484200" cy="226800"/>
           </a:xfrm>
           <a:prstGeom prst="rect">
             <a:avLst/>
@@ -8020,7 +8016,7 @@
         <p:spPr>
           <a:xfrm>
             <a:off x="300600" y="228600"/>
-            <a:ext cx="8614440" cy="685440"/>
+            <a:ext cx="8614080" cy="685080"/>
           </a:xfrm>
           <a:prstGeom prst="rect">
             <a:avLst/>
@@ -8049,7 +8045,11 @@
             </a:pPr>
             <a:r>
               <a:rPr b="0" lang="en-US" sz="1800" spc="-1" strike="noStrike">
-                <a:latin typeface="Arial"/>
+                <a:solidFill>
+                  <a:srgbClr val="000000"/>
+                </a:solidFill>
+                <a:latin typeface="Arial"/>
+                <a:ea typeface="DejaVu Sans"/>
               </a:rPr>
               <a:t>TITLE</a:t>
             </a:r>
@@ -8098,7 +8098,7 @@
         <p:spPr>
           <a:xfrm>
             <a:off x="0" y="3075480"/>
-            <a:ext cx="9143280" cy="2494800"/>
+            <a:ext cx="9142920" cy="2494440"/>
           </a:xfrm>
           <a:prstGeom prst="roundRect">
             <a:avLst>
@@ -8162,7 +8162,7 @@
         <p:spPr>
           <a:xfrm>
             <a:off x="474840" y="841680"/>
-            <a:ext cx="2556720" cy="2055240"/>
+            <a:ext cx="2556360" cy="2054880"/>
           </a:xfrm>
           <a:prstGeom prst="roundRect">
             <a:avLst>
@@ -8202,7 +8202,7 @@
         <p:spPr>
           <a:xfrm>
             <a:off x="592920" y="973800"/>
-            <a:ext cx="2289600" cy="729000"/>
+            <a:ext cx="2289240" cy="728640"/>
           </a:xfrm>
           <a:prstGeom prst="rect">
             <a:avLst/>
@@ -8254,7 +8254,7 @@
         <p:spPr>
           <a:xfrm>
             <a:off x="592920" y="1757520"/>
-            <a:ext cx="2289600" cy="1162080"/>
+            <a:ext cx="2289240" cy="1161720"/>
           </a:xfrm>
           <a:prstGeom prst="rect">
             <a:avLst/>
@@ -8316,7 +8316,7 @@
         <p:spPr>
           <a:xfrm>
             <a:off x="3309120" y="841680"/>
-            <a:ext cx="2556720" cy="2055240"/>
+            <a:ext cx="2556360" cy="2054880"/>
           </a:xfrm>
           <a:prstGeom prst="roundRect">
             <a:avLst>
@@ -8356,7 +8356,7 @@
         <p:spPr>
           <a:xfrm>
             <a:off x="3426840" y="973800"/>
-            <a:ext cx="2289600" cy="729000"/>
+            <a:ext cx="2289240" cy="728640"/>
           </a:xfrm>
           <a:prstGeom prst="rect">
             <a:avLst/>
@@ -8408,7 +8408,7 @@
         <p:spPr>
           <a:xfrm>
             <a:off x="3426840" y="1757520"/>
-            <a:ext cx="2289600" cy="1162080"/>
+            <a:ext cx="2289240" cy="1161720"/>
           </a:xfrm>
           <a:prstGeom prst="rect">
             <a:avLst/>
@@ -8460,7 +8460,7 @@
         <p:spPr>
           <a:xfrm>
             <a:off x="6143040" y="841680"/>
-            <a:ext cx="2556720" cy="2055240"/>
+            <a:ext cx="2556360" cy="2054880"/>
           </a:xfrm>
           <a:prstGeom prst="roundRect">
             <a:avLst>
@@ -8500,7 +8500,7 @@
         <p:spPr>
           <a:xfrm>
             <a:off x="6260760" y="973800"/>
-            <a:ext cx="2289600" cy="729000"/>
+            <a:ext cx="2289240" cy="728640"/>
           </a:xfrm>
           <a:prstGeom prst="rect">
             <a:avLst/>
@@ -8552,7 +8552,7 @@
         <p:spPr>
           <a:xfrm>
             <a:off x="6260760" y="1757520"/>
-            <a:ext cx="2289600" cy="1162080"/>
+            <a:ext cx="2289240" cy="1161720"/>
           </a:xfrm>
           <a:prstGeom prst="rect">
             <a:avLst/>
@@ -8604,7 +8604,7 @@
         <p:spPr>
           <a:xfrm>
             <a:off x="8519760" y="4831560"/>
-            <a:ext cx="484560" cy="226800"/>
+            <a:ext cx="484200" cy="226800"/>
           </a:xfrm>
           <a:prstGeom prst="rect">
             <a:avLst/>
@@ -8656,7 +8656,7 @@
         <p:spPr>
           <a:xfrm>
             <a:off x="457200" y="349200"/>
-            <a:ext cx="8457840" cy="1022040"/>
+            <a:ext cx="8457480" cy="1021680"/>
           </a:xfrm>
           <a:prstGeom prst="rect">
             <a:avLst/>
@@ -8685,7 +8685,11 @@
             </a:pPr>
             <a:r>
               <a:rPr b="0" lang="en-US" sz="1800" spc="-1" strike="noStrike">
-                <a:latin typeface="Arial"/>
+                <a:solidFill>
+                  <a:srgbClr val="000000"/>
+                </a:solidFill>
+                <a:latin typeface="Arial"/>
+                <a:ea typeface="DejaVu Sans"/>
               </a:rPr>
               <a:t>TITLE</a:t>
             </a:r>
@@ -8741,7 +8745,7 @@
         <p:spPr>
           <a:xfrm>
             <a:off x="5014080" y="250200"/>
-            <a:ext cx="3820320" cy="4624920"/>
+            <a:ext cx="3819960" cy="4624560"/>
           </a:xfrm>
           <a:prstGeom prst="roundRect">
             <a:avLst>
@@ -8807,7 +8811,7 @@
         <p:spPr>
           <a:xfrm>
             <a:off x="329400" y="250200"/>
-            <a:ext cx="4424760" cy="4624920"/>
+            <a:ext cx="4424400" cy="4624560"/>
           </a:xfrm>
           <a:prstGeom prst="roundRect">
             <a:avLst>
@@ -8845,7 +8849,7 @@
         <p:spPr>
           <a:xfrm>
             <a:off x="581760" y="828720"/>
-            <a:ext cx="3901680" cy="550440"/>
+            <a:ext cx="3901320" cy="550080"/>
           </a:xfrm>
           <a:prstGeom prst="rect">
             <a:avLst/>
@@ -8907,7 +8911,7 @@
         <p:spPr>
           <a:xfrm>
             <a:off x="581760" y="1364400"/>
-            <a:ext cx="3901680" cy="789480"/>
+            <a:ext cx="3901320" cy="789120"/>
           </a:xfrm>
           <a:prstGeom prst="rect">
             <a:avLst/>
@@ -8969,7 +8973,7 @@
         <p:spPr>
           <a:xfrm>
             <a:off x="578160" y="2154600"/>
-            <a:ext cx="3901680" cy="550440"/>
+            <a:ext cx="3901320" cy="550080"/>
           </a:xfrm>
           <a:prstGeom prst="rect">
             <a:avLst/>
@@ -9021,7 +9025,7 @@
         <p:spPr>
           <a:xfrm>
             <a:off x="578160" y="2687040"/>
-            <a:ext cx="3901680" cy="843120"/>
+            <a:ext cx="3901320" cy="842760"/>
           </a:xfrm>
           <a:prstGeom prst="rect">
             <a:avLst/>
@@ -9083,7 +9087,7 @@
         <p:spPr>
           <a:xfrm>
             <a:off x="578160" y="3482280"/>
-            <a:ext cx="3901680" cy="550440"/>
+            <a:ext cx="3901320" cy="550080"/>
           </a:xfrm>
           <a:prstGeom prst="rect">
             <a:avLst/>
@@ -9135,7 +9139,7 @@
         <p:spPr>
           <a:xfrm>
             <a:off x="578160" y="4015080"/>
-            <a:ext cx="3901680" cy="794520"/>
+            <a:ext cx="3901320" cy="794160"/>
           </a:xfrm>
           <a:prstGeom prst="rect">
             <a:avLst/>
@@ -9197,7 +9201,7 @@
         <p:spPr>
           <a:xfrm>
             <a:off x="8519760" y="4831560"/>
-            <a:ext cx="484560" cy="226800"/>
+            <a:ext cx="484200" cy="226800"/>
           </a:xfrm>
           <a:prstGeom prst="rect">
             <a:avLst/>
@@ -9249,7 +9253,7 @@
         <p:spPr>
           <a:xfrm>
             <a:off x="493200" y="300600"/>
-            <a:ext cx="4078440" cy="842040"/>
+            <a:ext cx="4078080" cy="841680"/>
           </a:xfrm>
           <a:prstGeom prst="rect">
             <a:avLst/>
@@ -9278,7 +9282,11 @@
             </a:pPr>
             <a:r>
               <a:rPr b="0" lang="en-US" sz="1800" spc="-1" strike="noStrike">
-                <a:latin typeface="Arial"/>
+                <a:solidFill>
+                  <a:srgbClr val="000000"/>
+                </a:solidFill>
+                <a:latin typeface="Arial"/>
+                <a:ea typeface="DejaVu Sans"/>
               </a:rPr>
               <a:t>TITLE</a:t>
             </a:r>
@@ -9327,7 +9335,7 @@
         <p:spPr>
           <a:xfrm>
             <a:off x="479160" y="2886480"/>
-            <a:ext cx="365040" cy="359640"/>
+            <a:ext cx="364680" cy="359280"/>
           </a:xfrm>
           <a:prstGeom prst="roundRect">
             <a:avLst>
@@ -9357,7 +9365,7 @@
         <p:spPr>
           <a:xfrm>
             <a:off x="3440880" y="2886480"/>
-            <a:ext cx="365040" cy="359640"/>
+            <a:ext cx="364680" cy="359280"/>
           </a:xfrm>
           <a:prstGeom prst="roundRect">
             <a:avLst>
@@ -9387,7 +9395,7 @@
         <p:spPr>
           <a:xfrm>
             <a:off x="6402960" y="2886480"/>
-            <a:ext cx="365040" cy="359640"/>
+            <a:ext cx="364680" cy="359280"/>
           </a:xfrm>
           <a:prstGeom prst="roundRect">
             <a:avLst>
@@ -9417,7 +9425,7 @@
         <p:spPr>
           <a:xfrm>
             <a:off x="479160" y="2883600"/>
-            <a:ext cx="365040" cy="363960"/>
+            <a:ext cx="364680" cy="363960"/>
           </a:xfrm>
           <a:prstGeom prst="rect">
             <a:avLst/>
@@ -9469,7 +9477,7 @@
         <p:spPr>
           <a:xfrm>
             <a:off x="3440880" y="2883600"/>
-            <a:ext cx="365040" cy="363960"/>
+            <a:ext cx="364680" cy="363960"/>
           </a:xfrm>
           <a:prstGeom prst="rect">
             <a:avLst/>
@@ -9521,7 +9529,7 @@
         <p:spPr>
           <a:xfrm>
             <a:off x="6402960" y="2883600"/>
-            <a:ext cx="365040" cy="363960"/>
+            <a:ext cx="364680" cy="363960"/>
           </a:xfrm>
           <a:prstGeom prst="rect">
             <a:avLst/>
@@ -9573,7 +9581,7 @@
         <p:spPr>
           <a:xfrm>
             <a:off x="858960" y="2571840"/>
-            <a:ext cx="2354760" cy="713520"/>
+            <a:ext cx="2354400" cy="713160"/>
           </a:xfrm>
           <a:prstGeom prst="rect">
             <a:avLst/>
@@ -9635,7 +9643,7 @@
         <p:spPr>
           <a:xfrm>
             <a:off x="858960" y="3356280"/>
-            <a:ext cx="2354760" cy="1564920"/>
+            <a:ext cx="2354400" cy="1564560"/>
           </a:xfrm>
           <a:prstGeom prst="rect">
             <a:avLst/>
@@ -9697,7 +9705,7 @@
         <p:spPr>
           <a:xfrm>
             <a:off x="3821040" y="2571840"/>
-            <a:ext cx="2354760" cy="713520"/>
+            <a:ext cx="2354400" cy="713160"/>
           </a:xfrm>
           <a:prstGeom prst="rect">
             <a:avLst/>
@@ -9759,7 +9767,7 @@
         <p:spPr>
           <a:xfrm>
             <a:off x="3821040" y="3356280"/>
-            <a:ext cx="2354760" cy="1564920"/>
+            <a:ext cx="2354400" cy="1564560"/>
           </a:xfrm>
           <a:prstGeom prst="rect">
             <a:avLst/>
@@ -9821,7 +9829,7 @@
         <p:spPr>
           <a:xfrm>
             <a:off x="6782760" y="2571840"/>
-            <a:ext cx="2293920" cy="713520"/>
+            <a:ext cx="2293560" cy="713160"/>
           </a:xfrm>
           <a:prstGeom prst="rect">
             <a:avLst/>
@@ -9883,7 +9891,7 @@
         <p:spPr>
           <a:xfrm>
             <a:off x="6782760" y="3356280"/>
-            <a:ext cx="2293920" cy="1564920"/>
+            <a:ext cx="2293560" cy="1564560"/>
           </a:xfrm>
           <a:prstGeom prst="rect">
             <a:avLst/>
@@ -9945,7 +9953,7 @@
         <p:spPr>
           <a:xfrm>
             <a:off x="0" y="-478800"/>
-            <a:ext cx="9143280" cy="2327760"/>
+            <a:ext cx="9142920" cy="2327400"/>
           </a:xfrm>
           <a:prstGeom prst="roundRect">
             <a:avLst>
@@ -10009,7 +10017,7 @@
         <p:spPr>
           <a:xfrm>
             <a:off x="8519760" y="4831560"/>
-            <a:ext cx="484560" cy="226800"/>
+            <a:ext cx="484200" cy="226800"/>
           </a:xfrm>
           <a:prstGeom prst="rect">
             <a:avLst/>
@@ -10061,7 +10069,7 @@
         <p:spPr>
           <a:xfrm>
             <a:off x="228600" y="2057400"/>
-            <a:ext cx="8686440" cy="685440"/>
+            <a:ext cx="8686080" cy="685080"/>
           </a:xfrm>
           <a:prstGeom prst="rect">
             <a:avLst/>
@@ -10090,7 +10098,11 @@
             </a:pPr>
             <a:r>
               <a:rPr b="0" lang="en-US" sz="1800" spc="-1" strike="noStrike">
-                <a:latin typeface="Arial"/>
+                <a:solidFill>
+                  <a:srgbClr val="000000"/>
+                </a:solidFill>
+                <a:latin typeface="Arial"/>
+                <a:ea typeface="DejaVu Sans"/>
               </a:rPr>
               <a:t>TITLE</a:t>
             </a:r>
